--- a/slides/presentations/2026-03-18-seminar-feldt.pptx
+++ b/slides/presentations/2026-03-18-seminar-feldt.pptx
@@ -266,7 +266,7 @@
           <a:p>
             <a:fld id="{67028809-A3C0-435B-AC12-B9138744A337}" type="datetimeFigureOut">
               <a:rPr lang="en-SE" smtClean="0"/>
-              <a:t>2026-03-19</a:t>
+              <a:t>2026-06-17</a:t>
             </a:fld>
             <a:endParaRPr lang="en-SE"/>
           </a:p>
@@ -854,7 +854,7 @@
           <a:p>
             <a:fld id="{37DCE796-1B8A-41D3-B18D-B249256E7F45}" type="datetime1">
               <a:rPr lang="de-DE" smtClean="0"/>
-              <a:t>19.03.2026</a:t>
+              <a:t>17.06.2026</a:t>
             </a:fld>
             <a:endParaRPr lang="en-SE"/>
           </a:p>
@@ -1107,7 +1107,7 @@
           <a:p>
             <a:fld id="{A1C06950-82F8-45F4-A28D-9FBF8CAE29F7}" type="datetime1">
               <a:rPr lang="de-DE" smtClean="0"/>
-              <a:t>19.03.2026</a:t>
+              <a:t>17.06.2026</a:t>
             </a:fld>
             <a:endParaRPr lang="en-SE"/>
           </a:p>
@@ -1431,7 +1431,7 @@
           <a:p>
             <a:fld id="{5BC0AF29-9533-4D4E-A309-A5791971D2E2}" type="datetime1">
               <a:rPr lang="de-DE" smtClean="0"/>
-              <a:t>19.03.2026</a:t>
+              <a:t>17.06.2026</a:t>
             </a:fld>
             <a:endParaRPr lang="en-SE"/>
           </a:p>
@@ -1722,7 +1722,7 @@
           <a:p>
             <a:fld id="{9E67268F-5191-4EDD-9773-1EAA25AC2D33}" type="datetime1">
               <a:rPr lang="de-DE" smtClean="0"/>
-              <a:t>19.03.2026</a:t>
+              <a:t>17.06.2026</a:t>
             </a:fld>
             <a:endParaRPr lang="en-SE"/>
           </a:p>
@@ -2220,8 +2220,8 @@
         </p:nvSpPr>
         <p:spPr>
           <a:xfrm>
-            <a:off x="7326064" y="5859885"/>
-            <a:ext cx="4175374" cy="523220"/>
+            <a:off x="6795534" y="5859885"/>
+            <a:ext cx="4705904" cy="738664"/>
           </a:xfrm>
           <a:prstGeom prst="rect">
             <a:avLst/>
@@ -2251,19 +2251,41 @@
           <a:p>
             <a:pPr algn="r"/>
             <a:r>
-              <a:rPr lang="en-US" sz="1400" noProof="0" dirty="0"/>
-              <a:t>This work is licensed under the </a:t>
+              <a:rPr lang="en-US" sz="1400" dirty="0"/>
+              <a:t>The source code is licensed under the </a:t>
             </a:r>
             <a:r>
-              <a:rPr lang="en-US" sz="1400" noProof="0" dirty="0">
+              <a:rPr lang="en-SE" sz="1400" dirty="0">
                 <a:hlinkClick r:id="rId3"/>
               </a:rPr>
-              <a:t>Apache-2.0</a:t>
+              <a:t>Apache License 2.0</a:t>
             </a:r>
             <a:r>
-              <a:rPr lang="en-US" sz="1400" noProof="0" dirty="0"/>
-              <a:t> License.</a:t>
+              <a:rPr lang="en-US" sz="1400" dirty="0"/>
+              <a:t>.</a:t>
             </a:r>
+          </a:p>
+          <a:p>
+            <a:pPr algn="r"/>
+            <a:r>
+              <a:rPr lang="en-US" sz="1400" dirty="0"/>
+              <a:t>This presentation is licensed under</a:t>
+            </a:r>
+            <a:r>
+              <a:rPr lang="en-SE" sz="1400" dirty="0"/>
+              <a:t> </a:t>
+            </a:r>
+            <a:r>
+              <a:rPr lang="de-DE" sz="1400" dirty="0">
+                <a:hlinkClick r:id="rId4"/>
+              </a:rPr>
+              <a:t>CC BY-NC-SA 4.0</a:t>
+            </a:r>
+            <a:r>
+              <a:rPr lang="en-SE" sz="1400"/>
+              <a:t>.</a:t>
+            </a:r>
+            <a:endParaRPr lang="en-US" sz="1400" dirty="0"/>
           </a:p>
         </p:txBody>
       </p:sp>
@@ -2324,7 +2346,7 @@
           <a:p>
             <a:r>
               <a:rPr lang="en-US" noProof="0" dirty="0">
-                <a:hlinkClick r:id="rId4"/>
+                <a:hlinkClick r:id="rId5"/>
               </a:rPr>
               <a:t>https://julianfrattini.github.io/</a:t>
             </a:r>
@@ -2356,7 +2378,7 @@
             <a:avLst/>
           </a:prstGeom>
           <a:blipFill dpi="0" rotWithShape="1">
-            <a:blip r:embed="rId5">
+            <a:blip r:embed="rId6">
               <a:extLst>
                 <a:ext uri="{28A0092B-C50C-407E-A947-70E740481C1C}">
                   <a14:useLocalDpi xmlns:a14="http://schemas.microsoft.com/office/drawing/2010/main" val="0"/>
@@ -2452,7 +2474,7 @@
               <p:nvPr/>
             </p:nvPicPr>
             <p:blipFill>
-              <a:blip r:embed="rId6"/>
+              <a:blip r:embed="rId7"/>
               <a:stretch>
                 <a:fillRect/>
               </a:stretch>
@@ -2581,7 +2603,7 @@
         <p:sp>
           <p:nvSpPr>
             <p:cNvPr id="7" name="Rectangle 6">
-              <a:hlinkClick r:id="rId7"/>
+              <a:hlinkClick r:id="rId8"/>
               <a:extLst>
                 <a:ext uri="{FF2B5EF4-FFF2-40B4-BE49-F238E27FC236}">
                   <a16:creationId xmlns:a16="http://schemas.microsoft.com/office/drawing/2014/main" id="{1523D628-A64F-768E-A385-ECA75D071607}"/>
@@ -2759,7 +2781,7 @@
           <a:p>
             <a:fld id="{A1C06950-82F8-45F4-A28D-9FBF8CAE29F7}" type="datetime1">
               <a:rPr lang="de-DE" smtClean="0"/>
-              <a:t>19.03.2026</a:t>
+              <a:t>17.06.2026</a:t>
             </a:fld>
             <a:endParaRPr lang="en-SE"/>
           </a:p>
@@ -5044,7 +5066,7 @@
           <a:p>
             <a:fld id="{A1C06950-82F8-45F4-A28D-9FBF8CAE29F7}" type="datetime1">
               <a:rPr lang="de-DE" smtClean="0"/>
-              <a:t>19.03.2026</a:t>
+              <a:t>17.06.2026</a:t>
             </a:fld>
             <a:endParaRPr lang="en-SE"/>
           </a:p>
@@ -7110,7 +7132,7 @@
           <a:p>
             <a:fld id="{A1C06950-82F8-45F4-A28D-9FBF8CAE29F7}" type="datetime1">
               <a:rPr lang="de-DE" smtClean="0"/>
-              <a:t>19.03.2026</a:t>
+              <a:t>17.06.2026</a:t>
             </a:fld>
             <a:endParaRPr lang="en-SE"/>
           </a:p>
@@ -9210,7 +9232,7 @@
           <a:p>
             <a:fld id="{A1C06950-82F8-45F4-A28D-9FBF8CAE29F7}" type="datetime1">
               <a:rPr lang="de-DE" smtClean="0"/>
-              <a:t>19.03.2026</a:t>
+              <a:t>17.06.2026</a:t>
             </a:fld>
             <a:endParaRPr lang="en-SE"/>
           </a:p>
@@ -10954,7 +10976,7 @@
           <a:p>
             <a:fld id="{A1C06950-82F8-45F4-A28D-9FBF8CAE29F7}" type="datetime1">
               <a:rPr lang="de-DE" smtClean="0"/>
-              <a:t>19.03.2026</a:t>
+              <a:t>17.06.2026</a:t>
             </a:fld>
             <a:endParaRPr lang="en-SE"/>
           </a:p>
@@ -12064,7 +12086,7 @@
           <a:p>
             <a:fld id="{A1C06950-82F8-45F4-A28D-9FBF8CAE29F7}" type="datetime1">
               <a:rPr lang="de-DE" smtClean="0"/>
-              <a:t>19.03.2026</a:t>
+              <a:t>17.06.2026</a:t>
             </a:fld>
             <a:endParaRPr lang="en-SE"/>
           </a:p>
@@ -13257,7 +13279,7 @@
           <a:p>
             <a:fld id="{A1C06950-82F8-45F4-A28D-9FBF8CAE29F7}" type="datetime1">
               <a:rPr lang="de-DE" smtClean="0"/>
-              <a:t>19.03.2026</a:t>
+              <a:t>17.06.2026</a:t>
             </a:fld>
             <a:endParaRPr lang="en-SE"/>
           </a:p>
@@ -16029,8 +16051,8 @@
             </a:p>
           </p:txBody>
         </p:sp>
-        <mc:AlternateContent xmlns:mc="http://schemas.openxmlformats.org/markup-compatibility/2006">
-          <mc:Choice xmlns:a14="http://schemas.microsoft.com/office/drawing/2010/main" Requires="a14">
+        <mc:AlternateContent xmlns:mc="http://schemas.openxmlformats.org/markup-compatibility/2006" xmlns:a14="http://schemas.microsoft.com/office/drawing/2010/main">
+          <mc:Choice Requires="a14">
             <p:sp>
               <p:nvSpPr>
                 <p:cNvPr id="146" name="TextBox 145">
@@ -16108,7 +16130,7 @@
               </p:txBody>
             </p:sp>
           </mc:Choice>
-          <mc:Fallback>
+          <mc:Fallback xmlns="">
             <p:sp>
               <p:nvSpPr>
                 <p:cNvPr id="146" name="TextBox 145">
@@ -16494,8 +16516,8 @@
             </a:p>
           </p:txBody>
         </p:sp>
-        <mc:AlternateContent xmlns:mc="http://schemas.openxmlformats.org/markup-compatibility/2006">
-          <mc:Choice xmlns:a14="http://schemas.microsoft.com/office/drawing/2010/main" Requires="a14">
+        <mc:AlternateContent xmlns:mc="http://schemas.openxmlformats.org/markup-compatibility/2006" xmlns:a14="http://schemas.microsoft.com/office/drawing/2010/main">
+          <mc:Choice Requires="a14">
             <p:sp>
               <p:nvSpPr>
                 <p:cNvPr id="148" name="TextBox 147">
@@ -16573,7 +16595,7 @@
               </p:txBody>
             </p:sp>
           </mc:Choice>
-          <mc:Fallback>
+          <mc:Fallback xmlns="">
             <p:sp>
               <p:nvSpPr>
                 <p:cNvPr id="148" name="TextBox 147">
@@ -16669,8 +16691,8 @@
             </a:p>
           </p:txBody>
         </p:sp>
-        <mc:AlternateContent xmlns:mc="http://schemas.openxmlformats.org/markup-compatibility/2006">
-          <mc:Choice xmlns:a14="http://schemas.microsoft.com/office/drawing/2010/main" Requires="a14">
+        <mc:AlternateContent xmlns:mc="http://schemas.openxmlformats.org/markup-compatibility/2006" xmlns:a14="http://schemas.microsoft.com/office/drawing/2010/main">
+          <mc:Choice Requires="a14">
             <p:sp>
               <p:nvSpPr>
                 <p:cNvPr id="153" name="TextBox 152">
@@ -16760,7 +16782,7 @@
               </p:txBody>
             </p:sp>
           </mc:Choice>
-          <mc:Fallback>
+          <mc:Fallback xmlns="">
             <p:sp>
               <p:nvSpPr>
                 <p:cNvPr id="153" name="TextBox 152">
@@ -17147,8 +17169,8 @@
             </a:p>
           </p:txBody>
         </p:sp>
-        <mc:AlternateContent xmlns:mc="http://schemas.openxmlformats.org/markup-compatibility/2006">
-          <mc:Choice xmlns:a14="http://schemas.microsoft.com/office/drawing/2010/main" Requires="a14">
+        <mc:AlternateContent xmlns:mc="http://schemas.openxmlformats.org/markup-compatibility/2006" xmlns:a14="http://schemas.microsoft.com/office/drawing/2010/main">
+          <mc:Choice Requires="a14">
             <p:sp>
               <p:nvSpPr>
                 <p:cNvPr id="157" name="TextBox 156">
@@ -17226,7 +17248,7 @@
               </p:txBody>
             </p:sp>
           </mc:Choice>
-          <mc:Fallback>
+          <mc:Fallback xmlns="">
             <p:sp>
               <p:nvSpPr>
                 <p:cNvPr id="157" name="TextBox 156">
@@ -17322,8 +17344,8 @@
             </a:p>
           </p:txBody>
         </p:sp>
-        <mc:AlternateContent xmlns:mc="http://schemas.openxmlformats.org/markup-compatibility/2006">
-          <mc:Choice xmlns:a14="http://schemas.microsoft.com/office/drawing/2010/main" Requires="a14">
+        <mc:AlternateContent xmlns:mc="http://schemas.openxmlformats.org/markup-compatibility/2006" xmlns:a14="http://schemas.microsoft.com/office/drawing/2010/main">
+          <mc:Choice Requires="a14">
             <p:sp>
               <p:nvSpPr>
                 <p:cNvPr id="162" name="TextBox 161">
@@ -17413,7 +17435,7 @@
               </p:txBody>
             </p:sp>
           </mc:Choice>
-          <mc:Fallback>
+          <mc:Fallback xmlns="">
             <p:sp>
               <p:nvSpPr>
                 <p:cNvPr id="162" name="TextBox 161">
@@ -17507,8 +17529,8 @@
             </a:p>
           </p:txBody>
         </p:sp>
-        <mc:AlternateContent xmlns:mc="http://schemas.openxmlformats.org/markup-compatibility/2006">
-          <mc:Choice xmlns:a14="http://schemas.microsoft.com/office/drawing/2010/main" Requires="a14">
+        <mc:AlternateContent xmlns:mc="http://schemas.openxmlformats.org/markup-compatibility/2006" xmlns:a14="http://schemas.microsoft.com/office/drawing/2010/main">
+          <mc:Choice Requires="a14">
             <p:sp>
               <p:nvSpPr>
                 <p:cNvPr id="167" name="TextBox 166">
@@ -17586,7 +17608,7 @@
               </p:txBody>
             </p:sp>
           </mc:Choice>
-          <mc:Fallback>
+          <mc:Fallback xmlns="">
             <p:sp>
               <p:nvSpPr>
                 <p:cNvPr id="167" name="TextBox 166">
@@ -17680,8 +17702,8 @@
             </a:p>
           </p:txBody>
         </p:sp>
-        <mc:AlternateContent xmlns:mc="http://schemas.openxmlformats.org/markup-compatibility/2006">
-          <mc:Choice xmlns:a14="http://schemas.microsoft.com/office/drawing/2010/main" Requires="a14">
+        <mc:AlternateContent xmlns:mc="http://schemas.openxmlformats.org/markup-compatibility/2006" xmlns:a14="http://schemas.microsoft.com/office/drawing/2010/main">
+          <mc:Choice Requires="a14">
             <p:sp>
               <p:nvSpPr>
                 <p:cNvPr id="170" name="TextBox 169">
@@ -17759,7 +17781,7 @@
               </p:txBody>
             </p:sp>
           </mc:Choice>
-          <mc:Fallback>
+          <mc:Fallback xmlns="">
             <p:sp>
               <p:nvSpPr>
                 <p:cNvPr id="170" name="TextBox 169">
@@ -18145,8 +18167,8 @@
             </a:p>
           </p:txBody>
         </p:sp>
-        <mc:AlternateContent xmlns:mc="http://schemas.openxmlformats.org/markup-compatibility/2006">
-          <mc:Choice xmlns:a14="http://schemas.microsoft.com/office/drawing/2010/main" Requires="a14">
+        <mc:AlternateContent xmlns:mc="http://schemas.openxmlformats.org/markup-compatibility/2006" xmlns:a14="http://schemas.microsoft.com/office/drawing/2010/main">
+          <mc:Choice Requires="a14">
             <p:sp>
               <p:nvSpPr>
                 <p:cNvPr id="155" name="TextBox 154">
@@ -18224,7 +18246,7 @@
               </p:txBody>
             </p:sp>
           </mc:Choice>
-          <mc:Fallback>
+          <mc:Fallback xmlns="">
             <p:sp>
               <p:nvSpPr>
                 <p:cNvPr id="155" name="TextBox 154">
@@ -18269,8 +18291,8 @@
             </p:sp>
           </mc:Fallback>
         </mc:AlternateContent>
-        <mc:AlternateContent xmlns:mc="http://schemas.openxmlformats.org/markup-compatibility/2006">
-          <mc:Choice xmlns:a14="http://schemas.microsoft.com/office/drawing/2010/main" Requires="a14">
+        <mc:AlternateContent xmlns:mc="http://schemas.openxmlformats.org/markup-compatibility/2006" xmlns:a14="http://schemas.microsoft.com/office/drawing/2010/main">
+          <mc:Choice Requires="a14">
             <p:sp>
               <p:nvSpPr>
                 <p:cNvPr id="160" name="TextBox 159">
@@ -18348,7 +18370,7 @@
               </p:txBody>
             </p:sp>
           </mc:Choice>
-          <mc:Fallback>
+          <mc:Fallback xmlns="">
             <p:sp>
               <p:nvSpPr>
                 <p:cNvPr id="160" name="TextBox 159">
@@ -19223,7 +19245,7 @@
           <a:p>
             <a:fld id="{A1C06950-82F8-45F4-A28D-9FBF8CAE29F7}" type="datetime1">
               <a:rPr lang="de-DE" smtClean="0"/>
-              <a:t>19.03.2026</a:t>
+              <a:t>17.06.2026</a:t>
             </a:fld>
             <a:endParaRPr lang="en-SE"/>
           </a:p>
@@ -19517,7 +19539,7 @@
             <a:fld id="{A1C06950-82F8-45F4-A28D-9FBF8CAE29F7}" type="datetime1">
               <a:rPr lang="de-DE" smtClean="0"/>
               <a:pPr/>
-              <a:t>19.03.2026</a:t>
+              <a:t>17.06.2026</a:t>
             </a:fld>
             <a:endParaRPr lang="en-SE"/>
           </a:p>
@@ -19870,7 +19892,7 @@
           <a:p>
             <a:fld id="{A1C06950-82F8-45F4-A28D-9FBF8CAE29F7}" type="datetime1">
               <a:rPr lang="de-DE" smtClean="0"/>
-              <a:t>19.03.2026</a:t>
+              <a:t>17.06.2026</a:t>
             </a:fld>
             <a:endParaRPr lang="en-SE"/>
           </a:p>
@@ -23485,7 +23507,7 @@
           <a:p>
             <a:fld id="{B1F82A23-AB26-4EA9-9EE4-DB6F9A4796C6}" type="datetime1">
               <a:rPr lang="en-US" noProof="0" smtClean="0"/>
-              <a:t>3/19/2026</a:t>
+              <a:t>6/17/2026</a:t>
             </a:fld>
             <a:endParaRPr lang="en-US" noProof="0" dirty="0"/>
           </a:p>
@@ -23978,7 +24000,7 @@
           <a:p>
             <a:fld id="{A1C06950-82F8-45F4-A28D-9FBF8CAE29F7}" type="datetime1">
               <a:rPr lang="de-DE" smtClean="0"/>
-              <a:t>19.03.2026</a:t>
+              <a:t>17.06.2026</a:t>
             </a:fld>
             <a:endParaRPr lang="en-SE"/>
           </a:p>
@@ -24199,7 +24221,7 @@
           <a:p>
             <a:fld id="{A1C06950-82F8-45F4-A28D-9FBF8CAE29F7}" type="datetime1">
               <a:rPr lang="de-DE" smtClean="0"/>
-              <a:t>19.03.2026</a:t>
+              <a:t>17.06.2026</a:t>
             </a:fld>
             <a:endParaRPr lang="en-SE"/>
           </a:p>
@@ -24363,7 +24385,7 @@
           <a:p>
             <a:fld id="{A1C06950-82F8-45F4-A28D-9FBF8CAE29F7}" type="datetime1">
               <a:rPr lang="de-DE" smtClean="0"/>
-              <a:t>19.03.2026</a:t>
+              <a:t>17.06.2026</a:t>
             </a:fld>
             <a:endParaRPr lang="en-SE"/>
           </a:p>
@@ -24658,7 +24680,7 @@
           <a:p>
             <a:fld id="{A1C06950-82F8-45F4-A28D-9FBF8CAE29F7}" type="datetime1">
               <a:rPr lang="de-DE" smtClean="0"/>
-              <a:t>19.03.2026</a:t>
+              <a:t>17.06.2026</a:t>
             </a:fld>
             <a:endParaRPr lang="en-SE"/>
           </a:p>
@@ -25965,7 +25987,7 @@
           <a:p>
             <a:fld id="{A1C06950-82F8-45F4-A28D-9FBF8CAE29F7}" type="datetime1">
               <a:rPr lang="de-DE" smtClean="0"/>
-              <a:t>19.03.2026</a:t>
+              <a:t>17.06.2026</a:t>
             </a:fld>
             <a:endParaRPr lang="en-SE"/>
           </a:p>
@@ -26520,10 +26542,10 @@
             <p:nvPr/>
           </p:nvPicPr>
           <p:blipFill>
-            <a:blip r:embed="rId2">
+            <a:blip>
               <a:extLst>
                 <a:ext uri="{96DAC541-7B7A-43D3-8B79-37D633B846F1}">
-                  <asvg:svgBlip xmlns:asvg="http://schemas.microsoft.com/office/drawing/2016/SVG/main" r:embed="rId3"/>
+                  <asvg:svgBlip xmlns:asvg="http://schemas.microsoft.com/office/drawing/2016/SVG/main" r:embed="rId2"/>
                 </a:ext>
               </a:extLst>
             </a:blip>
@@ -26696,10 +26718,10 @@
             <p:nvPr/>
           </p:nvPicPr>
           <p:blipFill>
-            <a:blip r:embed="rId2">
+            <a:blip>
               <a:extLst>
                 <a:ext uri="{96DAC541-7B7A-43D3-8B79-37D633B846F1}">
-                  <asvg:svgBlip xmlns:asvg="http://schemas.microsoft.com/office/drawing/2016/SVG/main" r:embed="rId3"/>
+                  <asvg:svgBlip xmlns:asvg="http://schemas.microsoft.com/office/drawing/2016/SVG/main" r:embed="rId2"/>
                 </a:ext>
               </a:extLst>
             </a:blip>
@@ -26861,7 +26883,7 @@
           <a:p>
             <a:fld id="{A1C06950-82F8-45F4-A28D-9FBF8CAE29F7}" type="datetime1">
               <a:rPr lang="de-DE" smtClean="0"/>
-              <a:t>19.03.2026</a:t>
+              <a:t>17.06.2026</a:t>
             </a:fld>
             <a:endParaRPr lang="en-SE"/>
           </a:p>
@@ -28813,7 +28835,7 @@
           <a:p>
             <a:fld id="{A1C06950-82F8-45F4-A28D-9FBF8CAE29F7}" type="datetime1">
               <a:rPr lang="de-DE" smtClean="0"/>
-              <a:t>19.03.2026</a:t>
+              <a:t>17.06.2026</a:t>
             </a:fld>
             <a:endParaRPr lang="en-SE"/>
           </a:p>
@@ -29982,10 +30004,10 @@
             <p:nvPr/>
           </p:nvPicPr>
           <p:blipFill>
-            <a:blip r:embed="rId2">
+            <a:blip>
               <a:extLst>
                 <a:ext uri="{96DAC541-7B7A-43D3-8B79-37D633B846F1}">
-                  <asvg:svgBlip xmlns:asvg="http://schemas.microsoft.com/office/drawing/2016/SVG/main" r:embed="rId3"/>
+                  <asvg:svgBlip xmlns:asvg="http://schemas.microsoft.com/office/drawing/2016/SVG/main" r:embed="rId2"/>
                 </a:ext>
               </a:extLst>
             </a:blip>
@@ -30264,7 +30286,7 @@
           <a:p>
             <a:fld id="{A1C06950-82F8-45F4-A28D-9FBF8CAE29F7}" type="datetime1">
               <a:rPr lang="de-DE" smtClean="0"/>
-              <a:t>19.03.2026</a:t>
+              <a:t>17.06.2026</a:t>
             </a:fld>
             <a:endParaRPr lang="en-SE"/>
           </a:p>
